--- a/frontend/public/demos/contest-deck-final.pptx
+++ b/frontend/public/demos/contest-deck-final.pptx
@@ -13,6 +13,7 @@
     <p:sldId id="261" r:id="rId12"/>
     <p:sldId id="262" r:id="rId13"/>
     <p:sldId id="263" r:id="rId14"/>
+    <p:sldId id="264" r:id="rId15"/>
   </p:sldIdLst>
   <p:sldSz cx="12191695" cy="6858000" type="screen4x3"/>
   <p:notesSz cx="6858000" cy="9144000"/>
@@ -929,7 +930,7 @@
           <a:lstStyle/>
           <a:p>
             <a:r>
-              <a:t>Today: paid individual readings, credit system, 100% self-serve. Next 90 days: consistent print sample, luxurious printed edition, holiday gift pilot. Horizon: synastry at scale, English market, and a subscription box combining book and ritual.</a:t>
+              <a:t>And distribution is active TODAY. A Facebook campaign targeting Scorpio-sign users is live right now, 1,142 impressions in the first 24 hours, running until October 27. We're not showing you historical data — we're showing you a product in motion.</a:t>
             </a:r>
           </a:p>
         </p:txBody>
@@ -955,6 +956,76 @@
 </file>
 
 <file path=ppt/notesSlides/notesSlide8.xml><?xml version="1.0" encoding="utf-8"?>
+<p:notes xmlns:a="http://schemas.openxmlformats.org/drawingml/2006/main" xmlns:p="http://schemas.openxmlformats.org/presentationml/2006/main" xmlns:r="http://schemas.openxmlformats.org/officeDocument/2006/relationships">
+  <p:cSld>
+    <p:spTree>
+      <p:nvGrpSpPr>
+        <p:cNvPr id="1" name=""/>
+        <p:cNvGrpSpPr/>
+        <p:nvPr/>
+      </p:nvGrpSpPr>
+      <p:grpSpPr>
+        <a:xfrm>
+          <a:off x="0" y="0"/>
+          <a:ext cx="0" cy="0"/>
+          <a:chOff x="0" y="0"/>
+          <a:chExt cx="0" cy="0"/>
+        </a:xfrm>
+      </p:grpSpPr>
+      <p:sp>
+        <p:nvSpPr>
+          <p:cNvPr id="2" name="Slide Image Placeholder 1"/>
+          <p:cNvSpPr>
+            <a:spLocks noGrp="1"/>
+          </p:cNvSpPr>
+          <p:nvPr>
+            <p:ph type="sldImg" idx="2"/>
+          </p:nvPr>
+        </p:nvSpPr>
+        <p:spPr/>
+      </p:sp>
+      <p:sp>
+        <p:nvSpPr>
+          <p:cNvPr id="3" name="Notes Placeholder 2"/>
+          <p:cNvSpPr>
+            <a:spLocks noGrp="1"/>
+          </p:cNvSpPr>
+          <p:nvPr>
+            <p:ph type="body" idx="3" sz="quarter"/>
+          </p:nvPr>
+        </p:nvSpPr>
+        <p:spPr/>
+        <p:txBody>
+          <a:bodyPr/>
+          <a:lstStyle/>
+          <a:p>
+            <a:r>
+              <a:t>Today: paid individual readings, credit system, 100% self-serve. Next 90 days: consistent print sample, luxurious printed edition, holiday gift pilot. Horizon: synastry at scale, English market, and a subscription box combining book and ritual.</a:t>
+            </a:r>
+          </a:p>
+        </p:txBody>
+      </p:sp>
+      <p:sp>
+        <p:nvSpPr>
+          <p:cNvPr id="4" name="Slide Number Placeholder 3"/>
+          <p:cNvSpPr>
+            <a:spLocks noGrp="1"/>
+          </p:cNvSpPr>
+          <p:nvPr>
+            <p:ph type="sldNum" idx="5" sz="quarter"/>
+          </p:nvPr>
+        </p:nvSpPr>
+        <p:spPr/>
+      </p:sp>
+    </p:spTree>
+  </p:cSld>
+  <p:clrMapOvr>
+    <a:masterClrMapping/>
+  </p:clrMapOvr>
+</p:notes>
+</file>
+
+<file path=ppt/notesSlides/notesSlide9.xml><?xml version="1.0" encoding="utf-8"?>
 <p:notes xmlns:a="http://schemas.openxmlformats.org/drawingml/2006/main" xmlns:p="http://schemas.openxmlformats.org/presentationml/2006/main" xmlns:r="http://schemas.openxmlformats.org/officeDocument/2006/relationships">
   <p:cSld>
     <p:spTree>
@@ -7290,7 +7361,7 @@
                 </a:solidFill>
                 <a:latin typeface="Garamond"/>
               </a:rPr>
-              <a:t>Business model &amp; roadmap</a:t>
+              <a:t>Live acquisition — running now</a:t>
             </a:r>
           </a:p>
         </p:txBody>
@@ -7325,7 +7396,7 @@
                 </a:solidFill>
                 <a:latin typeface="Garamond"/>
               </a:rPr>
-              <a:t>Paid readings today — a book experience tomorrow.</a:t>
+              <a:t>A Facebook campaign is active while you read this slide.</a:t>
             </a:r>
           </a:p>
         </p:txBody>
@@ -7382,6 +7453,41 @@
         <p:spPr>
           <a:xfrm>
             <a:off x="822960" y="2743200"/>
+            <a:ext cx="3332378" cy="914400"/>
+          </a:xfrm>
+          <a:prstGeom prst="rect">
+            <a:avLst/>
+          </a:prstGeom>
+          <a:noFill/>
+        </p:spPr>
+        <p:txBody>
+          <a:bodyPr wrap="square" anchor="t" lIns="0" rIns="0" tIns="0" bIns="0">
+            <a:spAutoFit/>
+          </a:bodyPr>
+          <a:lstStyle/>
+          <a:p>
+            <a:pPr algn="l"/>
+            <a:r>
+              <a:rPr sz="4800" b="1" i="0">
+                <a:solidFill>
+                  <a:srgbClr val="D4AF37"/>
+                </a:solidFill>
+                <a:latin typeface="Garamond"/>
+              </a:rPr>
+              <a:t>1 142</a:t>
+            </a:r>
+          </a:p>
+        </p:txBody>
+      </p:sp>
+      <p:sp>
+        <p:nvSpPr>
+          <p:cNvPr id="7" name="TextBox 6"/>
+          <p:cNvSpPr txBox="1"/>
+          <p:nvPr/>
+        </p:nvSpPr>
+        <p:spPr>
+          <a:xfrm>
+            <a:off x="822960" y="3931920"/>
             <a:ext cx="3332378" cy="365760"/>
           </a:xfrm>
           <a:prstGeom prst="rect">
@@ -7397,267 +7503,335 @@
           <a:p>
             <a:pPr algn="l"/>
             <a:r>
-              <a:rPr sz="2000" b="1" i="0">
+              <a:rPr sz="1600" b="0" i="1">
+                <a:solidFill>
+                  <a:srgbClr val="F5EEE0"/>
+                </a:solidFill>
+                <a:latin typeface="Garamond"/>
+              </a:rPr>
+              <a:t>impressions</a:t>
+            </a:r>
+          </a:p>
+        </p:txBody>
+      </p:sp>
+      <p:sp>
+        <p:nvSpPr>
+          <p:cNvPr id="8" name="TextBox 7"/>
+          <p:cNvSpPr txBox="1"/>
+          <p:nvPr/>
+        </p:nvSpPr>
+        <p:spPr>
+          <a:xfrm>
+            <a:off x="822960" y="4389120"/>
+            <a:ext cx="3332378" cy="1005840"/>
+          </a:xfrm>
+          <a:prstGeom prst="rect">
+            <a:avLst/>
+          </a:prstGeom>
+          <a:noFill/>
+        </p:spPr>
+        <p:txBody>
+          <a:bodyPr wrap="square" anchor="t" lIns="0" rIns="0" tIns="0" bIns="0">
+            <a:spAutoFit/>
+          </a:bodyPr>
+          <a:lstStyle/>
+          <a:p>
+            <a:pPr algn="l"/>
+            <a:r>
+              <a:rPr sz="1200" b="0" i="0">
+                <a:solidFill>
+                  <a:srgbClr val="8A95AD"/>
+                </a:solidFill>
+                <a:latin typeface="Garamond"/>
+              </a:rPr>
+              <a:t>in the first 24 hours of today's wave.</a:t>
+            </a:r>
+          </a:p>
+        </p:txBody>
+      </p:sp>
+      <p:sp>
+        <p:nvSpPr>
+          <p:cNvPr id="9" name="TextBox 8"/>
+          <p:cNvSpPr txBox="1"/>
+          <p:nvPr/>
+        </p:nvSpPr>
+        <p:spPr>
+          <a:xfrm>
+            <a:off x="4429658" y="2743200"/>
+            <a:ext cx="3332378" cy="914400"/>
+          </a:xfrm>
+          <a:prstGeom prst="rect">
+            <a:avLst/>
+          </a:prstGeom>
+          <a:noFill/>
+        </p:spPr>
+        <p:txBody>
+          <a:bodyPr wrap="square" anchor="t" lIns="0" rIns="0" tIns="0" bIns="0">
+            <a:spAutoFit/>
+          </a:bodyPr>
+          <a:lstStyle/>
+          <a:p>
+            <a:pPr algn="l"/>
+            <a:r>
+              <a:rPr sz="4800" b="1" i="0">
                 <a:solidFill>
                   <a:srgbClr val="D4AF37"/>
                 </a:solidFill>
                 <a:latin typeface="Garamond"/>
               </a:rPr>
-              <a:t>Today</a:t>
-            </a:r>
-          </a:p>
-        </p:txBody>
-      </p:sp>
-      <p:sp>
-        <p:nvSpPr>
-          <p:cNvPr id="7" name="TextBox 6"/>
-          <p:cNvSpPr txBox="1"/>
-          <p:nvPr/>
-        </p:nvSpPr>
-        <p:spPr>
-          <a:xfrm>
-            <a:off x="822960" y="3291840"/>
-            <a:ext cx="3332378" cy="2743200"/>
-          </a:xfrm>
-          <a:prstGeom prst="rect">
-            <a:avLst/>
-          </a:prstGeom>
-          <a:noFill/>
-        </p:spPr>
-        <p:txBody>
-          <a:bodyPr wrap="square" anchor="t" lIns="0" rIns="0" tIns="0" bIns="0">
-            <a:spAutoFit/>
-          </a:bodyPr>
-          <a:lstStyle/>
-          <a:p>
-            <a:pPr algn="l"/>
-            <a:r>
-              <a:rPr sz="1400" b="0" i="0">
+              <a:t>1 071</a:t>
+            </a:r>
+          </a:p>
+        </p:txBody>
+      </p:sp>
+      <p:sp>
+        <p:nvSpPr>
+          <p:cNvPr id="10" name="TextBox 9"/>
+          <p:cNvSpPr txBox="1"/>
+          <p:nvPr/>
+        </p:nvSpPr>
+        <p:spPr>
+          <a:xfrm>
+            <a:off x="4429658" y="3931920"/>
+            <a:ext cx="3332378" cy="365760"/>
+          </a:xfrm>
+          <a:prstGeom prst="rect">
+            <a:avLst/>
+          </a:prstGeom>
+          <a:noFill/>
+        </p:spPr>
+        <p:txBody>
+          <a:bodyPr wrap="square" anchor="t" lIns="0" rIns="0" tIns="0" bIns="0">
+            <a:spAutoFit/>
+          </a:bodyPr>
+          <a:lstStyle/>
+          <a:p>
+            <a:pPr algn="l"/>
+            <a:r>
+              <a:rPr sz="1600" b="0" i="1">
                 <a:solidFill>
                   <a:srgbClr val="F5EEE0"/>
                 </a:solidFill>
                 <a:latin typeface="Garamond"/>
               </a:rPr>
-              <a:t>· Personal reports purchased individually</a:t>
-            </a:r>
-          </a:p>
-          <a:p>
-            <a:pPr algn="l"/>
-            <a:r>
-              <a:rPr sz="1400" b="0" i="0">
+              <a:t>people reached</a:t>
+            </a:r>
+          </a:p>
+        </p:txBody>
+      </p:sp>
+      <p:sp>
+        <p:nvSpPr>
+          <p:cNvPr id="11" name="TextBox 10"/>
+          <p:cNvSpPr txBox="1"/>
+          <p:nvPr/>
+        </p:nvSpPr>
+        <p:spPr>
+          <a:xfrm>
+            <a:off x="4429658" y="4389120"/>
+            <a:ext cx="3332378" cy="1005840"/>
+          </a:xfrm>
+          <a:prstGeom prst="rect">
+            <a:avLst/>
+          </a:prstGeom>
+          <a:noFill/>
+        </p:spPr>
+        <p:txBody>
+          <a:bodyPr wrap="square" anchor="t" lIns="0" rIns="0" tIns="0" bIns="0">
+            <a:spAutoFit/>
+          </a:bodyPr>
+          <a:lstStyle/>
+          <a:p>
+            <a:pPr algn="l"/>
+            <a:r>
+              <a:rPr sz="1200" b="0" i="0">
+                <a:solidFill>
+                  <a:srgbClr val="8A95AD"/>
+                </a:solidFill>
+                <a:latin typeface="Garamond"/>
+              </a:rPr>
+              <a:t>in a Scorpio-sign zodiac segment.</a:t>
+            </a:r>
+          </a:p>
+        </p:txBody>
+      </p:sp>
+      <p:sp>
+        <p:nvSpPr>
+          <p:cNvPr id="12" name="TextBox 11"/>
+          <p:cNvSpPr txBox="1"/>
+          <p:nvPr/>
+        </p:nvSpPr>
+        <p:spPr>
+          <a:xfrm>
+            <a:off x="8036356" y="2743200"/>
+            <a:ext cx="3332378" cy="914400"/>
+          </a:xfrm>
+          <a:prstGeom prst="rect">
+            <a:avLst/>
+          </a:prstGeom>
+          <a:noFill/>
+        </p:spPr>
+        <p:txBody>
+          <a:bodyPr wrap="square" anchor="t" lIns="0" rIns="0" tIns="0" bIns="0">
+            <a:spAutoFit/>
+          </a:bodyPr>
+          <a:lstStyle/>
+          <a:p>
+            <a:pPr algn="l"/>
+            <a:r>
+              <a:rPr sz="4800" b="1" i="0">
+                <a:solidFill>
+                  <a:srgbClr val="D4AF37"/>
+                </a:solidFill>
+                <a:latin typeface="Garamond"/>
+              </a:rPr>
+              <a:t>10,34 €</a:t>
+            </a:r>
+          </a:p>
+        </p:txBody>
+      </p:sp>
+      <p:sp>
+        <p:nvSpPr>
+          <p:cNvPr id="13" name="TextBox 12"/>
+          <p:cNvSpPr txBox="1"/>
+          <p:nvPr/>
+        </p:nvSpPr>
+        <p:spPr>
+          <a:xfrm>
+            <a:off x="8036356" y="3931920"/>
+            <a:ext cx="3332378" cy="365760"/>
+          </a:xfrm>
+          <a:prstGeom prst="rect">
+            <a:avLst/>
+          </a:prstGeom>
+          <a:noFill/>
+        </p:spPr>
+        <p:txBody>
+          <a:bodyPr wrap="square" anchor="t" lIns="0" rIns="0" tIns="0" bIns="0">
+            <a:spAutoFit/>
+          </a:bodyPr>
+          <a:lstStyle/>
+          <a:p>
+            <a:pPr algn="l"/>
+            <a:r>
+              <a:rPr sz="1600" b="0" i="1">
                 <a:solidFill>
                   <a:srgbClr val="F5EEE0"/>
                 </a:solidFill>
                 <a:latin typeface="Garamond"/>
               </a:rPr>
-              <a:t>· Credit system for recurring readings</a:t>
-            </a:r>
-          </a:p>
-          <a:p>
-            <a:pPr algn="l"/>
-            <a:r>
-              <a:rPr sz="1400" b="0" i="0">
-                <a:solidFill>
-                  <a:srgbClr val="F5EEE0"/>
-                </a:solidFill>
-                <a:latin typeface="Garamond"/>
-              </a:rPr>
-              <a:t>· 100% self-serve via Stripe</a:t>
-            </a:r>
-          </a:p>
-        </p:txBody>
-      </p:sp>
-      <p:sp>
-        <p:nvSpPr>
-          <p:cNvPr id="8" name="TextBox 7"/>
-          <p:cNvSpPr txBox="1"/>
-          <p:nvPr/>
-        </p:nvSpPr>
-        <p:spPr>
-          <a:xfrm>
-            <a:off x="4429658" y="2743200"/>
-            <a:ext cx="3332378" cy="365760"/>
-          </a:xfrm>
-          <a:prstGeom prst="rect">
-            <a:avLst/>
-          </a:prstGeom>
-          <a:noFill/>
-        </p:spPr>
-        <p:txBody>
-          <a:bodyPr wrap="square" anchor="t" lIns="0" rIns="0" tIns="0" bIns="0">
-            <a:spAutoFit/>
-          </a:bodyPr>
-          <a:lstStyle/>
-          <a:p>
-            <a:pPr algn="l"/>
-            <a:r>
-              <a:rPr sz="2000" b="1" i="0">
+              <a:t>spent today</a:t>
+            </a:r>
+          </a:p>
+        </p:txBody>
+      </p:sp>
+      <p:sp>
+        <p:nvSpPr>
+          <p:cNvPr id="14" name="TextBox 13"/>
+          <p:cNvSpPr txBox="1"/>
+          <p:nvPr/>
+        </p:nvSpPr>
+        <p:spPr>
+          <a:xfrm>
+            <a:off x="8036356" y="4389120"/>
+            <a:ext cx="3332378" cy="1005840"/>
+          </a:xfrm>
+          <a:prstGeom prst="rect">
+            <a:avLst/>
+          </a:prstGeom>
+          <a:noFill/>
+        </p:spPr>
+        <p:txBody>
+          <a:bodyPr wrap="square" anchor="t" lIns="0" rIns="0" tIns="0" bIns="0">
+            <a:spAutoFit/>
+          </a:bodyPr>
+          <a:lstStyle/>
+          <a:p>
+            <a:pPr algn="l"/>
+            <a:r>
+              <a:rPr sz="1200" b="0" i="0">
+                <a:solidFill>
+                  <a:srgbClr val="8A95AD"/>
+                </a:solidFill>
+                <a:latin typeface="Garamond"/>
+              </a:rPr>
+              <a:t>campaign runs until Oct 27 — scaling live.</a:t>
+            </a:r>
+          </a:p>
+        </p:txBody>
+      </p:sp>
+      <p:sp>
+        <p:nvSpPr>
+          <p:cNvPr id="15" name="TextBox 14"/>
+          <p:cNvSpPr txBox="1"/>
+          <p:nvPr/>
+        </p:nvSpPr>
+        <p:spPr>
+          <a:xfrm>
+            <a:off x="822960" y="5577840"/>
+            <a:ext cx="10545775" cy="274320"/>
+          </a:xfrm>
+          <a:prstGeom prst="rect">
+            <a:avLst/>
+          </a:prstGeom>
+          <a:noFill/>
+        </p:spPr>
+        <p:txBody>
+          <a:bodyPr wrap="square" anchor="t" lIns="0" rIns="0" tIns="0" bIns="0">
+            <a:spAutoFit/>
+          </a:bodyPr>
+          <a:lstStyle/>
+          <a:p>
+            <a:pPr algn="l"/>
+            <a:r>
+              <a:rPr sz="1000" b="0" i="0">
+                <a:solidFill>
+                  <a:srgbClr val="8A95AD"/>
+                </a:solidFill>
+                <a:latin typeface="Garamond"/>
+              </a:rPr>
+              <a:t>Ad currently running:</a:t>
+            </a:r>
+          </a:p>
+        </p:txBody>
+      </p:sp>
+      <p:sp>
+        <p:nvSpPr>
+          <p:cNvPr id="16" name="TextBox 15"/>
+          <p:cNvSpPr txBox="1"/>
+          <p:nvPr/>
+        </p:nvSpPr>
+        <p:spPr>
+          <a:xfrm>
+            <a:off x="822960" y="5852160"/>
+            <a:ext cx="10545775" cy="365760"/>
+          </a:xfrm>
+          <a:prstGeom prst="rect">
+            <a:avLst/>
+          </a:prstGeom>
+          <a:noFill/>
+        </p:spPr>
+        <p:txBody>
+          <a:bodyPr wrap="square" anchor="t" lIns="0" rIns="0" tIns="0" bIns="0">
+            <a:spAutoFit/>
+          </a:bodyPr>
+          <a:lstStyle/>
+          <a:p>
+            <a:pPr algn="l"/>
+            <a:r>
+              <a:rPr sz="1400" b="0" i="1">
                 <a:solidFill>
                   <a:srgbClr val="D4AF37"/>
                 </a:solidFill>
                 <a:latin typeface="Garamond"/>
               </a:rPr>
-              <a:t>Next 90 days</a:t>
-            </a:r>
-          </a:p>
-        </p:txBody>
-      </p:sp>
-      <p:sp>
-        <p:nvSpPr>
-          <p:cNvPr id="9" name="TextBox 8"/>
-          <p:cNvSpPr txBox="1"/>
-          <p:nvPr/>
-        </p:nvSpPr>
-        <p:spPr>
-          <a:xfrm>
-            <a:off x="4429658" y="3291840"/>
-            <a:ext cx="3332378" cy="2743200"/>
-          </a:xfrm>
-          <a:prstGeom prst="rect">
-            <a:avLst/>
-          </a:prstGeom>
-          <a:noFill/>
-        </p:spPr>
-        <p:txBody>
-          <a:bodyPr wrap="square" anchor="t" lIns="0" rIns="0" tIns="0" bIns="0">
-            <a:spAutoFit/>
-          </a:bodyPr>
-          <a:lstStyle/>
-          <a:p>
-            <a:pPr algn="l"/>
-            <a:r>
-              <a:rPr sz="1400" b="0" i="0">
-                <a:solidFill>
-                  <a:srgbClr val="F5EEE0"/>
-                </a:solidFill>
-                <a:latin typeface="Garamond"/>
-              </a:rPr>
-              <a:t>· Consistent 32-page print sample</a:t>
-            </a:r>
-          </a:p>
-          <a:p>
-            <a:pPr algn="l"/>
-            <a:r>
-              <a:rPr sz="1400" b="0" i="0">
-                <a:solidFill>
-                  <a:srgbClr val="F5EEE0"/>
-                </a:solidFill>
-                <a:latin typeface="Garamond"/>
-              </a:rPr>
-              <a:t>· Luxurious printed edition (A5 cream)</a:t>
-            </a:r>
-          </a:p>
-          <a:p>
-            <a:pPr algn="l"/>
-            <a:r>
-              <a:rPr sz="1400" b="0" i="0">
-                <a:solidFill>
-                  <a:srgbClr val="F5EEE0"/>
-                </a:solidFill>
-                <a:latin typeface="Garamond"/>
-              </a:rPr>
-              <a:t>· Gift pilot for the holiday season</a:t>
-            </a:r>
-          </a:p>
-        </p:txBody>
-      </p:sp>
-      <p:sp>
-        <p:nvSpPr>
-          <p:cNvPr id="10" name="TextBox 9"/>
-          <p:cNvSpPr txBox="1"/>
-          <p:nvPr/>
-        </p:nvSpPr>
-        <p:spPr>
-          <a:xfrm>
-            <a:off x="8036356" y="2743200"/>
-            <a:ext cx="3332378" cy="365760"/>
-          </a:xfrm>
-          <a:prstGeom prst="rect">
-            <a:avLst/>
-          </a:prstGeom>
-          <a:noFill/>
-        </p:spPr>
-        <p:txBody>
-          <a:bodyPr wrap="square" anchor="t" lIns="0" rIns="0" tIns="0" bIns="0">
-            <a:spAutoFit/>
-          </a:bodyPr>
-          <a:lstStyle/>
-          <a:p>
-            <a:pPr algn="l"/>
-            <a:r>
-              <a:rPr sz="2000" b="1" i="0">
-                <a:solidFill>
-                  <a:srgbClr val="D4AF37"/>
-                </a:solidFill>
-                <a:latin typeface="Garamond"/>
-              </a:rPr>
-              <a:t>Horizon</a:t>
-            </a:r>
-          </a:p>
-        </p:txBody>
-      </p:sp>
-      <p:sp>
-        <p:nvSpPr>
-          <p:cNvPr id="11" name="TextBox 10"/>
-          <p:cNvSpPr txBox="1"/>
-          <p:nvPr/>
-        </p:nvSpPr>
-        <p:spPr>
-          <a:xfrm>
-            <a:off x="8036356" y="3291840"/>
-            <a:ext cx="3332378" cy="2743200"/>
-          </a:xfrm>
-          <a:prstGeom prst="rect">
-            <a:avLst/>
-          </a:prstGeom>
-          <a:noFill/>
-        </p:spPr>
-        <p:txBody>
-          <a:bodyPr wrap="square" anchor="t" lIns="0" rIns="0" tIns="0" bIns="0">
-            <a:spAutoFit/>
-          </a:bodyPr>
-          <a:lstStyle/>
-          <a:p>
-            <a:pPr algn="l"/>
-            <a:r>
-              <a:rPr sz="1400" b="0" i="0">
-                <a:solidFill>
-                  <a:srgbClr val="F5EEE0"/>
-                </a:solidFill>
-                <a:latin typeface="Garamond"/>
-              </a:rPr>
-              <a:t>· Synastry (compatibility) at scale</a:t>
-            </a:r>
-          </a:p>
-          <a:p>
-            <a:pPr algn="l"/>
-            <a:r>
-              <a:rPr sz="1400" b="0" i="0">
-                <a:solidFill>
-                  <a:srgbClr val="F5EEE0"/>
-                </a:solidFill>
-                <a:latin typeface="Garamond"/>
-              </a:rPr>
-              <a:t>· English market expansion</a:t>
-            </a:r>
-          </a:p>
-          <a:p>
-            <a:pPr algn="l"/>
-            <a:r>
-              <a:rPr sz="1400" b="0" i="0">
-                <a:solidFill>
-                  <a:srgbClr val="F5EEE0"/>
-                </a:solidFill>
-                <a:latin typeface="Garamond"/>
-              </a:rPr>
-              <a:t>· Book + ritual box subscription</a:t>
-            </a:r>
-          </a:p>
-        </p:txBody>
-      </p:sp>
-      <p:sp>
-        <p:nvSpPr>
-          <p:cNvPr id="12" name="TextBox 11"/>
+              <a:t>« ♏ Scorpion… cette semaine, quelque chose est en… »</a:t>
+            </a:r>
+          </a:p>
+        </p:txBody>
+      </p:sp>
+      <p:sp>
+        <p:nvSpPr>
+          <p:cNvPr id="17" name="TextBox 16"/>
           <p:cNvSpPr txBox="1"/>
           <p:nvPr/>
         </p:nvSpPr>
@@ -7692,7 +7866,7 @@
       </p:sp>
       <p:sp>
         <p:nvSpPr>
-          <p:cNvPr id="13" name="TextBox 12"/>
+          <p:cNvPr id="18" name="TextBox 17"/>
           <p:cNvSpPr txBox="1"/>
           <p:nvPr/>
         </p:nvSpPr>
@@ -7720,7 +7894,7 @@
                 </a:solidFill>
                 <a:latin typeface="Garamond"/>
               </a:rPr>
-              <a:t>7 / 8</a:t>
+              <a:t>7 / 9</a:t>
             </a:r>
           </a:p>
         </p:txBody>
@@ -7802,43 +7976,78 @@
         </p:nvSpPr>
         <p:spPr>
           <a:xfrm>
-            <a:off x="822960" y="1645920"/>
-            <a:ext cx="10545775" cy="914400"/>
-          </a:xfrm>
-          <a:prstGeom prst="rect">
-            <a:avLst/>
-          </a:prstGeom>
-          <a:noFill/>
-        </p:spPr>
-        <p:txBody>
-          <a:bodyPr wrap="square" anchor="t" lIns="0" rIns="0" tIns="0" bIns="0">
-            <a:spAutoFit/>
-          </a:bodyPr>
-          <a:lstStyle/>
-          <a:p>
-            <a:pPr algn="l"/>
-            <a:r>
-              <a:rPr sz="5600" b="0" i="0">
+            <a:off x="822960" y="822960"/>
+            <a:ext cx="10545775" cy="822960"/>
+          </a:xfrm>
+          <a:prstGeom prst="rect">
+            <a:avLst/>
+          </a:prstGeom>
+          <a:noFill/>
+        </p:spPr>
+        <p:txBody>
+          <a:bodyPr wrap="square" anchor="t" lIns="0" rIns="0" tIns="0" bIns="0">
+            <a:spAutoFit/>
+          </a:bodyPr>
+          <a:lstStyle/>
+          <a:p>
+            <a:pPr algn="l"/>
+            <a:r>
+              <a:rPr sz="3600" b="0" i="0">
                 <a:solidFill>
                   <a:srgbClr val="F5EEE0"/>
                 </a:solidFill>
                 <a:latin typeface="Garamond"/>
               </a:rPr>
-              <a:t>Thank you.</a:t>
-            </a:r>
-          </a:p>
-        </p:txBody>
-      </p:sp>
-      <p:sp>
-        <p:nvSpPr>
-          <p:cNvPr id="4" name="Rectangle 3"/>
+              <a:t>Business model &amp; roadmap</a:t>
+            </a:r>
+          </a:p>
+        </p:txBody>
+      </p:sp>
+      <p:sp>
+        <p:nvSpPr>
+          <p:cNvPr id="4" name="TextBox 3"/>
+          <p:cNvSpPr txBox="1"/>
+          <p:nvPr/>
+        </p:nvSpPr>
+        <p:spPr>
+          <a:xfrm>
+            <a:off x="822960" y="1554480"/>
+            <a:ext cx="10545775" cy="457200"/>
+          </a:xfrm>
+          <a:prstGeom prst="rect">
+            <a:avLst/>
+          </a:prstGeom>
+          <a:noFill/>
+        </p:spPr>
+        <p:txBody>
+          <a:bodyPr wrap="square" anchor="t" lIns="0" rIns="0" tIns="0" bIns="0">
+            <a:spAutoFit/>
+          </a:bodyPr>
+          <a:lstStyle/>
+          <a:p>
+            <a:pPr algn="l"/>
+            <a:r>
+              <a:rPr sz="1800" b="0" i="1">
+                <a:solidFill>
+                  <a:srgbClr val="D4AF37"/>
+                </a:solidFill>
+                <a:latin typeface="Garamond"/>
+              </a:rPr>
+              <a:t>Paid readings today — a book experience tomorrow.</a:t>
+            </a:r>
+          </a:p>
+        </p:txBody>
+      </p:sp>
+      <p:sp>
+        <p:nvSpPr>
+          <p:cNvPr id="5" name="Rectangle 4"/>
           <p:cNvSpPr/>
           <p:nvPr/>
         </p:nvSpPr>
         <p:spPr>
           <a:xfrm>
-            <a:off x="822960" y="3017520"/>
-            <a:ext cx="1371600" cy="10000"/>
+            <a:off x="822960" y="2194560"/>
+            <a:ext cx="1097280" cy="10000"/>
           </a:xfrm>
           <a:prstGeom prst="rect">
             <a:avLst/>
@@ -7874,6 +8083,505 @@
       </p:sp>
       <p:sp>
         <p:nvSpPr>
+          <p:cNvPr id="6" name="TextBox 5"/>
+          <p:cNvSpPr txBox="1"/>
+          <p:nvPr/>
+        </p:nvSpPr>
+        <p:spPr>
+          <a:xfrm>
+            <a:off x="822960" y="2743200"/>
+            <a:ext cx="3332378" cy="365760"/>
+          </a:xfrm>
+          <a:prstGeom prst="rect">
+            <a:avLst/>
+          </a:prstGeom>
+          <a:noFill/>
+        </p:spPr>
+        <p:txBody>
+          <a:bodyPr wrap="square" anchor="t" lIns="0" rIns="0" tIns="0" bIns="0">
+            <a:spAutoFit/>
+          </a:bodyPr>
+          <a:lstStyle/>
+          <a:p>
+            <a:pPr algn="l"/>
+            <a:r>
+              <a:rPr sz="2000" b="1" i="0">
+                <a:solidFill>
+                  <a:srgbClr val="D4AF37"/>
+                </a:solidFill>
+                <a:latin typeface="Garamond"/>
+              </a:rPr>
+              <a:t>Today</a:t>
+            </a:r>
+          </a:p>
+        </p:txBody>
+      </p:sp>
+      <p:sp>
+        <p:nvSpPr>
+          <p:cNvPr id="7" name="TextBox 6"/>
+          <p:cNvSpPr txBox="1"/>
+          <p:nvPr/>
+        </p:nvSpPr>
+        <p:spPr>
+          <a:xfrm>
+            <a:off x="822960" y="3291840"/>
+            <a:ext cx="3332378" cy="2743200"/>
+          </a:xfrm>
+          <a:prstGeom prst="rect">
+            <a:avLst/>
+          </a:prstGeom>
+          <a:noFill/>
+        </p:spPr>
+        <p:txBody>
+          <a:bodyPr wrap="square" anchor="t" lIns="0" rIns="0" tIns="0" bIns="0">
+            <a:spAutoFit/>
+          </a:bodyPr>
+          <a:lstStyle/>
+          <a:p>
+            <a:pPr algn="l"/>
+            <a:r>
+              <a:rPr sz="1400" b="0" i="0">
+                <a:solidFill>
+                  <a:srgbClr val="F5EEE0"/>
+                </a:solidFill>
+                <a:latin typeface="Garamond"/>
+              </a:rPr>
+              <a:t>· Personal reports purchased individually</a:t>
+            </a:r>
+          </a:p>
+          <a:p>
+            <a:pPr algn="l"/>
+            <a:r>
+              <a:rPr sz="1400" b="0" i="0">
+                <a:solidFill>
+                  <a:srgbClr val="F5EEE0"/>
+                </a:solidFill>
+                <a:latin typeface="Garamond"/>
+              </a:rPr>
+              <a:t>· Credit system for recurring readings</a:t>
+            </a:r>
+          </a:p>
+          <a:p>
+            <a:pPr algn="l"/>
+            <a:r>
+              <a:rPr sz="1400" b="0" i="0">
+                <a:solidFill>
+                  <a:srgbClr val="F5EEE0"/>
+                </a:solidFill>
+                <a:latin typeface="Garamond"/>
+              </a:rPr>
+              <a:t>· 100% self-serve via Stripe</a:t>
+            </a:r>
+          </a:p>
+        </p:txBody>
+      </p:sp>
+      <p:sp>
+        <p:nvSpPr>
+          <p:cNvPr id="8" name="TextBox 7"/>
+          <p:cNvSpPr txBox="1"/>
+          <p:nvPr/>
+        </p:nvSpPr>
+        <p:spPr>
+          <a:xfrm>
+            <a:off x="4429658" y="2743200"/>
+            <a:ext cx="3332378" cy="365760"/>
+          </a:xfrm>
+          <a:prstGeom prst="rect">
+            <a:avLst/>
+          </a:prstGeom>
+          <a:noFill/>
+        </p:spPr>
+        <p:txBody>
+          <a:bodyPr wrap="square" anchor="t" lIns="0" rIns="0" tIns="0" bIns="0">
+            <a:spAutoFit/>
+          </a:bodyPr>
+          <a:lstStyle/>
+          <a:p>
+            <a:pPr algn="l"/>
+            <a:r>
+              <a:rPr sz="2000" b="1" i="0">
+                <a:solidFill>
+                  <a:srgbClr val="D4AF37"/>
+                </a:solidFill>
+                <a:latin typeface="Garamond"/>
+              </a:rPr>
+              <a:t>Next 90 days</a:t>
+            </a:r>
+          </a:p>
+        </p:txBody>
+      </p:sp>
+      <p:sp>
+        <p:nvSpPr>
+          <p:cNvPr id="9" name="TextBox 8"/>
+          <p:cNvSpPr txBox="1"/>
+          <p:nvPr/>
+        </p:nvSpPr>
+        <p:spPr>
+          <a:xfrm>
+            <a:off x="4429658" y="3291840"/>
+            <a:ext cx="3332378" cy="2743200"/>
+          </a:xfrm>
+          <a:prstGeom prst="rect">
+            <a:avLst/>
+          </a:prstGeom>
+          <a:noFill/>
+        </p:spPr>
+        <p:txBody>
+          <a:bodyPr wrap="square" anchor="t" lIns="0" rIns="0" tIns="0" bIns="0">
+            <a:spAutoFit/>
+          </a:bodyPr>
+          <a:lstStyle/>
+          <a:p>
+            <a:pPr algn="l"/>
+            <a:r>
+              <a:rPr sz="1400" b="0" i="0">
+                <a:solidFill>
+                  <a:srgbClr val="F5EEE0"/>
+                </a:solidFill>
+                <a:latin typeface="Garamond"/>
+              </a:rPr>
+              <a:t>· Consistent 32-page print sample</a:t>
+            </a:r>
+          </a:p>
+          <a:p>
+            <a:pPr algn="l"/>
+            <a:r>
+              <a:rPr sz="1400" b="0" i="0">
+                <a:solidFill>
+                  <a:srgbClr val="F5EEE0"/>
+                </a:solidFill>
+                <a:latin typeface="Garamond"/>
+              </a:rPr>
+              <a:t>· Luxurious printed edition (A5 cream)</a:t>
+            </a:r>
+          </a:p>
+          <a:p>
+            <a:pPr algn="l"/>
+            <a:r>
+              <a:rPr sz="1400" b="0" i="0">
+                <a:solidFill>
+                  <a:srgbClr val="F5EEE0"/>
+                </a:solidFill>
+                <a:latin typeface="Garamond"/>
+              </a:rPr>
+              <a:t>· Gift pilot for the holiday season</a:t>
+            </a:r>
+          </a:p>
+        </p:txBody>
+      </p:sp>
+      <p:sp>
+        <p:nvSpPr>
+          <p:cNvPr id="10" name="TextBox 9"/>
+          <p:cNvSpPr txBox="1"/>
+          <p:nvPr/>
+        </p:nvSpPr>
+        <p:spPr>
+          <a:xfrm>
+            <a:off x="8036356" y="2743200"/>
+            <a:ext cx="3332378" cy="365760"/>
+          </a:xfrm>
+          <a:prstGeom prst="rect">
+            <a:avLst/>
+          </a:prstGeom>
+          <a:noFill/>
+        </p:spPr>
+        <p:txBody>
+          <a:bodyPr wrap="square" anchor="t" lIns="0" rIns="0" tIns="0" bIns="0">
+            <a:spAutoFit/>
+          </a:bodyPr>
+          <a:lstStyle/>
+          <a:p>
+            <a:pPr algn="l"/>
+            <a:r>
+              <a:rPr sz="2000" b="1" i="0">
+                <a:solidFill>
+                  <a:srgbClr val="D4AF37"/>
+                </a:solidFill>
+                <a:latin typeface="Garamond"/>
+              </a:rPr>
+              <a:t>Horizon</a:t>
+            </a:r>
+          </a:p>
+        </p:txBody>
+      </p:sp>
+      <p:sp>
+        <p:nvSpPr>
+          <p:cNvPr id="11" name="TextBox 10"/>
+          <p:cNvSpPr txBox="1"/>
+          <p:nvPr/>
+        </p:nvSpPr>
+        <p:spPr>
+          <a:xfrm>
+            <a:off x="8036356" y="3291840"/>
+            <a:ext cx="3332378" cy="2743200"/>
+          </a:xfrm>
+          <a:prstGeom prst="rect">
+            <a:avLst/>
+          </a:prstGeom>
+          <a:noFill/>
+        </p:spPr>
+        <p:txBody>
+          <a:bodyPr wrap="square" anchor="t" lIns="0" rIns="0" tIns="0" bIns="0">
+            <a:spAutoFit/>
+          </a:bodyPr>
+          <a:lstStyle/>
+          <a:p>
+            <a:pPr algn="l"/>
+            <a:r>
+              <a:rPr sz="1400" b="0" i="0">
+                <a:solidFill>
+                  <a:srgbClr val="F5EEE0"/>
+                </a:solidFill>
+                <a:latin typeface="Garamond"/>
+              </a:rPr>
+              <a:t>· Synastry (compatibility) at scale</a:t>
+            </a:r>
+          </a:p>
+          <a:p>
+            <a:pPr algn="l"/>
+            <a:r>
+              <a:rPr sz="1400" b="0" i="0">
+                <a:solidFill>
+                  <a:srgbClr val="F5EEE0"/>
+                </a:solidFill>
+                <a:latin typeface="Garamond"/>
+              </a:rPr>
+              <a:t>· English market expansion</a:t>
+            </a:r>
+          </a:p>
+          <a:p>
+            <a:pPr algn="l"/>
+            <a:r>
+              <a:rPr sz="1400" b="0" i="0">
+                <a:solidFill>
+                  <a:srgbClr val="F5EEE0"/>
+                </a:solidFill>
+                <a:latin typeface="Garamond"/>
+              </a:rPr>
+              <a:t>· Book + ritual box subscription</a:t>
+            </a:r>
+          </a:p>
+        </p:txBody>
+      </p:sp>
+      <p:sp>
+        <p:nvSpPr>
+          <p:cNvPr id="12" name="TextBox 11"/>
+          <p:cNvSpPr txBox="1"/>
+          <p:nvPr/>
+        </p:nvSpPr>
+        <p:spPr>
+          <a:xfrm>
+            <a:off x="548640" y="6400800"/>
+            <a:ext cx="3657600" cy="274320"/>
+          </a:xfrm>
+          <a:prstGeom prst="rect">
+            <a:avLst/>
+          </a:prstGeom>
+          <a:noFill/>
+        </p:spPr>
+        <p:txBody>
+          <a:bodyPr wrap="square" anchor="t" lIns="0" rIns="0" tIns="0" bIns="0">
+            <a:spAutoFit/>
+          </a:bodyPr>
+          <a:lstStyle/>
+          <a:p>
+            <a:pPr algn="l"/>
+            <a:r>
+              <a:rPr sz="900" b="0" i="0">
+                <a:solidFill>
+                  <a:srgbClr val="8A95AD"/>
+                </a:solidFill>
+                <a:latin typeface="Garamond"/>
+              </a:rPr>
+              <a:t>PLUME ASTRALE</a:t>
+            </a:r>
+          </a:p>
+        </p:txBody>
+      </p:sp>
+      <p:sp>
+        <p:nvSpPr>
+          <p:cNvPr id="13" name="TextBox 12"/>
+          <p:cNvSpPr txBox="1"/>
+          <p:nvPr/>
+        </p:nvSpPr>
+        <p:spPr>
+          <a:xfrm>
+            <a:off x="10728655" y="6400800"/>
+            <a:ext cx="914400" cy="274320"/>
+          </a:xfrm>
+          <a:prstGeom prst="rect">
+            <a:avLst/>
+          </a:prstGeom>
+          <a:noFill/>
+        </p:spPr>
+        <p:txBody>
+          <a:bodyPr wrap="square" anchor="t" lIns="0" rIns="0" tIns="0" bIns="0">
+            <a:spAutoFit/>
+          </a:bodyPr>
+          <a:lstStyle/>
+          <a:p>
+            <a:pPr algn="r"/>
+            <a:r>
+              <a:rPr sz="900" b="0" i="0">
+                <a:solidFill>
+                  <a:srgbClr val="8A95AD"/>
+                </a:solidFill>
+                <a:latin typeface="Garamond"/>
+              </a:rPr>
+              <a:t>8 / 9</a:t>
+            </a:r>
+          </a:p>
+        </p:txBody>
+      </p:sp>
+    </p:spTree>
+  </p:cSld>
+  <p:clrMapOvr>
+    <a:masterClrMapping/>
+  </p:clrMapOvr>
+</p:sld>
+</file>
+
+<file path=ppt/slides/slide9.xml><?xml version="1.0" encoding="utf-8"?>
+<p:sld xmlns:a="http://schemas.openxmlformats.org/drawingml/2006/main" xmlns:p="http://schemas.openxmlformats.org/presentationml/2006/main" xmlns:r="http://schemas.openxmlformats.org/officeDocument/2006/relationships">
+  <p:cSld>
+    <p:bg>
+      <p:bgPr>
+        <a:solidFill>
+          <a:srgbClr val="142342"/>
+        </a:solidFill>
+        <a:effectLst/>
+      </p:bgPr>
+    </p:bg>
+    <p:spTree>
+      <p:nvGrpSpPr>
+        <p:cNvPr id="1" name=""/>
+        <p:cNvGrpSpPr/>
+        <p:nvPr/>
+      </p:nvGrpSpPr>
+      <p:grpSpPr/>
+      <p:sp>
+        <p:nvSpPr>
+          <p:cNvPr id="2" name="Rectangle 1"/>
+          <p:cNvSpPr/>
+          <p:nvPr/>
+        </p:nvSpPr>
+        <p:spPr>
+          <a:xfrm>
+            <a:off x="320040" y="320040"/>
+            <a:ext cx="11551615" cy="6217920"/>
+          </a:xfrm>
+          <a:prstGeom prst="rect">
+            <a:avLst/>
+          </a:prstGeom>
+          <a:noFill/>
+          <a:ln w="6350">
+            <a:solidFill>
+              <a:srgbClr val="A78140"/>
+            </a:solidFill>
+          </a:ln>
+        </p:spPr>
+        <p:style>
+          <a:lnRef idx="1">
+            <a:schemeClr val="accent1"/>
+          </a:lnRef>
+          <a:fillRef idx="3">
+            <a:schemeClr val="accent1"/>
+          </a:fillRef>
+          <a:effectRef idx="2">
+            <a:schemeClr val="accent1"/>
+          </a:effectRef>
+          <a:fontRef idx="minor">
+            <a:schemeClr val="lt1"/>
+          </a:fontRef>
+        </p:style>
+        <p:txBody>
+          <a:bodyPr rtlCol="0" anchor="ctr"/>
+          <a:lstStyle/>
+          <a:p>
+            <a:pPr algn="ctr"/>
+          </a:p>
+        </p:txBody>
+      </p:sp>
+      <p:sp>
+        <p:nvSpPr>
+          <p:cNvPr id="3" name="TextBox 2"/>
+          <p:cNvSpPr txBox="1"/>
+          <p:nvPr/>
+        </p:nvSpPr>
+        <p:spPr>
+          <a:xfrm>
+            <a:off x="822960" y="1645920"/>
+            <a:ext cx="10545775" cy="914400"/>
+          </a:xfrm>
+          <a:prstGeom prst="rect">
+            <a:avLst/>
+          </a:prstGeom>
+          <a:noFill/>
+        </p:spPr>
+        <p:txBody>
+          <a:bodyPr wrap="square" anchor="t" lIns="0" rIns="0" tIns="0" bIns="0">
+            <a:spAutoFit/>
+          </a:bodyPr>
+          <a:lstStyle/>
+          <a:p>
+            <a:pPr algn="l"/>
+            <a:r>
+              <a:rPr sz="5600" b="0" i="0">
+                <a:solidFill>
+                  <a:srgbClr val="F5EEE0"/>
+                </a:solidFill>
+                <a:latin typeface="Garamond"/>
+              </a:rPr>
+              <a:t>Thank you.</a:t>
+            </a:r>
+          </a:p>
+        </p:txBody>
+      </p:sp>
+      <p:sp>
+        <p:nvSpPr>
+          <p:cNvPr id="4" name="Rectangle 3"/>
+          <p:cNvSpPr/>
+          <p:nvPr/>
+        </p:nvSpPr>
+        <p:spPr>
+          <a:xfrm>
+            <a:off x="822960" y="3017520"/>
+            <a:ext cx="1371600" cy="10000"/>
+          </a:xfrm>
+          <a:prstGeom prst="rect">
+            <a:avLst/>
+          </a:prstGeom>
+          <a:solidFill>
+            <a:srgbClr val="D4AF37"/>
+          </a:solidFill>
+          <a:ln>
+            <a:noFill/>
+          </a:ln>
+        </p:spPr>
+        <p:style>
+          <a:lnRef idx="1">
+            <a:schemeClr val="accent1"/>
+          </a:lnRef>
+          <a:fillRef idx="3">
+            <a:schemeClr val="accent1"/>
+          </a:fillRef>
+          <a:effectRef idx="2">
+            <a:schemeClr val="accent1"/>
+          </a:effectRef>
+          <a:fontRef idx="minor">
+            <a:schemeClr val="lt1"/>
+          </a:fontRef>
+        </p:style>
+        <p:txBody>
+          <a:bodyPr rtlCol="0" anchor="ctr"/>
+          <a:lstStyle/>
+          <a:p>
+            <a:pPr algn="ctr"/>
+          </a:p>
+        </p:txBody>
+      </p:sp>
+      <p:sp>
+        <p:nvSpPr>
           <p:cNvPr id="5" name="TextBox 4"/>
           <p:cNvSpPr txBox="1"/>
           <p:nvPr/>
@@ -8077,7 +8785,7 @@
                 </a:solidFill>
                 <a:latin typeface="Garamond"/>
               </a:rPr>
-              <a:t>8 / 8</a:t>
+              <a:t>9 / 9</a:t>
             </a:r>
           </a:p>
         </p:txBody>
